--- a/doc/13_アーキテクチャ説明資料.pptx
+++ b/doc/13_アーキテクチャ説明資料.pptx
@@ -3397,7 +3397,7 @@
                 <a:ea typeface="Meiryo"/>
               </a:rPr>
               <a:t>アプリ全体の構成 ・ 判断の理由 ・ いまできていないこと
-2026-09 時点 / データベース設計は doc/12_データベース構造レビュー資料.pptx を参照</a:t>
+データベース設計は doc/12_データベース構造レビュー資料.pptx を参照</a:t>
             </a:r>
           </a:p>
         </p:txBody>
@@ -3501,7 +3501,7 @@
                 <a:cs typeface="Meiryo"/>
                 <a:ea typeface="Meiryo"/>
               </a:rPr>
-              <a:t>窓口(ポート)の一覧 — 26本</a:t>
+              <a:t>窓口(ポート)の一覧 — 28本</a:t>
             </a:r>
             <a:r>
               <a:rPr sz="1250" b="0" i="0">
@@ -3740,7 +3740,7 @@
                 <a:cs typeface="Meiryo"/>
                 <a:ea typeface="Meiryo"/>
               </a:rPr>
-              <a:t>データの読み書き(12本)</a:t>
+              <a:t>データの読み書き(14本)</a:t>
             </a:r>
           </a:p>
         </p:txBody>
@@ -4024,6 +4024,58 @@
                 <a:ea typeface="Meiryo"/>
               </a:rPr>
               <a:t>AttendanceDay 勤怠</a:t>
+            </a:r>
+          </a:p>
+          <a:p>
+            <a:pPr marL="182880" indent="-182880">
+              <a:lnSpc>
+                <a:spcPct val="125000"/>
+              </a:lnSpc>
+              <a:spcBef>
+                <a:spcPts val="550"/>
+              </a:spcBef>
+              <a:buClr>
+                <a:srgbClr val="0369A1"/>
+              </a:buClr>
+              <a:buFont typeface="Meiryo"/>
+              <a:buChar char="▪"/>
+            </a:pPr>
+            <a:r>
+              <a:rPr sz="1050" b="0">
+                <a:solidFill>
+                  <a:srgbClr val="14223A"/>
+                </a:solidFill>
+                <a:latin typeface="Meiryo"/>
+                <a:cs typeface="Meiryo"/>
+                <a:ea typeface="Meiryo"/>
+              </a:rPr>
+              <a:t>Coupon クーポン</a:t>
+            </a:r>
+          </a:p>
+          <a:p>
+            <a:pPr marL="182880" indent="-182880">
+              <a:lnSpc>
+                <a:spcPct val="125000"/>
+              </a:lnSpc>
+              <a:spcBef>
+                <a:spcPts val="550"/>
+              </a:spcBef>
+              <a:buClr>
+                <a:srgbClr val="0369A1"/>
+              </a:buClr>
+              <a:buFont typeface="Meiryo"/>
+              <a:buChar char="▪"/>
+            </a:pPr>
+            <a:r>
+              <a:rPr sz="1050" b="0">
+                <a:solidFill>
+                  <a:srgbClr val="14223A"/>
+                </a:solidFill>
+                <a:latin typeface="Meiryo"/>
+                <a:cs typeface="Meiryo"/>
+                <a:ea typeface="Meiryo"/>
+              </a:rPr>
+              <a:t>CouponRedemption クーポン適用記録</a:t>
             </a:r>
           </a:p>
           <a:p>
@@ -4884,7 +4936,7 @@
                 <a:cs typeface="Meiryo"/>
                 <a:ea typeface="Meiryo"/>
               </a:rPr>
-              <a:t>テストでは偽の実装を渡すだけで済む。データベースも外部APIも起動しないため、343件のテストが約20秒で終わる</a:t>
+              <a:t>テストでは偽の実装を渡すだけで済む。データベースも外部APIも起動しないため、692件のテストが約15秒で終わる</a:t>
             </a:r>
           </a:p>
         </p:txBody>
@@ -13392,7 +13444,7 @@
                 <a:cs typeface="Meiryo"/>
                 <a:ea typeface="Meiryo"/>
               </a:rPr>
-              <a:t>同じマイグレーション(13テーブル)・同じ行レベルセキュリティ・同じ業務ロジック・同じAPIルート</a:t>
+              <a:t>同じマイグレーション(33テーブル)・同じ行レベルセキュリティ・同じ業務ロジック・同じAPIルート</a:t>
             </a:r>
           </a:p>
           <a:p>
@@ -14312,7 +14364,7 @@
                 <a:cs typeface="Meiryo"/>
                 <a:ea typeface="Meiryo"/>
               </a:rPr>
-              <a:t>   テスト43ファイル / 343件。分布は意図的に偏らせている</a:t>
+              <a:t>   テスト55ファイル / 692件。分布は意図的に偏らせている</a:t>
             </a:r>
           </a:p>
         </p:txBody>
@@ -14763,7 +14815,7 @@
                 <a:cs typeface="Meiryo"/>
                 <a:ea typeface="Meiryo"/>
               </a:rPr>
-              <a:t>鍵の世代</a:t>
+              <a:t>制約が実際に効くこと</a:t>
             </a:r>
             <a:r>
               <a:rPr sz="1050" b="0">
@@ -14774,7 +14826,7 @@
                 <a:cs typeface="Meiryo"/>
                 <a:ea typeface="Meiryo"/>
               </a:rPr>
-              <a:t>  交換後も旧世代の暗号文を復号できること、解約後はどの世代も読めないこと</a:t>
+              <a:t>  CHECK・一意制約・複合外部キーが不正なINSERTを本当に拒否することを、本番と同じマイグレーションを当てたDB上で確認(拒否理由が狙った制約名であることまで見る)</a:t>
             </a:r>
           </a:p>
         </p:txBody>
@@ -15042,7 +15094,7 @@
                 <a:cs typeface="Meiryo"/>
                 <a:ea typeface="Meiryo"/>
               </a:rPr>
-              <a:t>  リポジトリ層はブラウザ内DBで検証しており、本番ドライバ固有の挙動差は未確認</a:t>
+              <a:t>  リポジトリ層はブラウザ内DBで検証しており、本番ドライバ固有の挙動差と EXPLAIN による索引の効き方は未確認</a:t>
             </a:r>
           </a:p>
           <a:p>
@@ -15079,7 +15131,7 @@
                 <a:cs typeface="Meiryo"/>
                 <a:ea typeface="Meiryo"/>
               </a:rPr>
-              <a:t>  給与に直結する領域。実際の出勤簿との突き合わせはPhase 7の予定</a:t>
+              <a:t>  給与に直結する領域。実際の出勤簿との突き合わせはこれから</a:t>
             </a:r>
           </a:p>
           <a:p>
@@ -16369,7 +16421,7 @@
                 <a:cs typeface="Meiryo"/>
                 <a:ea typeface="Meiryo"/>
               </a:rPr>
-              <a:t>README「フェーズ状況」/ doc/07 / packages/db/src/schema</a:t>
+              <a:t>README「実装状況」/ doc/07 / packages/db/src/schema</a:t>
             </a:r>
           </a:p>
         </p:txBody>
@@ -16426,7 +16478,7 @@
         </p:nvGraphicFramePr>
         <p:xfrm>
           <a:off x="457200" y="1170432"/>
-          <a:ext cx="11277293" cy="4251960"/>
+          <a:ext cx="11277293" cy="4325112"/>
         </p:xfrm>
         <a:graphic>
           <a:graphicData uri="http://schemas.openxmlformats.org/drawingml/2006/table">
@@ -16531,7 +16583,7 @@
                   </a:tcPr>
                 </a:tc>
               </a:tr>
-              <a:tr h="438912">
+              <a:tr h="402336">
                 <a:tc>
                   <a:txBody>
                     <a:bodyPr wrap="square"/>
@@ -16612,7 +16664,7 @@
                           <a:cs typeface="Meiryo"/>
                           <a:ea typeface="Meiryo"/>
                         </a:rPr>
-                        <a:t>13テーブル、複合外部キー、FORCE。静的検査と実DB検証をCIで実行</a:t>
+                        <a:t>33テーブル、複合外部キー、FORCE。静的検査と実DB検証をCIで実行</a:t>
                       </a:r>
                     </a:p>
                   </a:txBody>
@@ -16623,7 +16675,7 @@
                   </a:tcPr>
                 </a:tc>
               </a:tr>
-              <a:tr h="438912">
+              <a:tr h="402336">
                 <a:tc>
                   <a:txBody>
                     <a:bodyPr wrap="square"/>
@@ -16715,7 +16767,7 @@
                   </a:tcPr>
                 </a:tc>
               </a:tr>
-              <a:tr h="438912">
+              <a:tr h="402336">
                 <a:tc>
                   <a:txBody>
                     <a:bodyPr wrap="square"/>
@@ -16807,7 +16859,7 @@
                   </a:tcPr>
                 </a:tc>
               </a:tr>
-              <a:tr h="438912">
+              <a:tr h="402336">
                 <a:tc>
                   <a:txBody>
                     <a:bodyPr wrap="square"/>
@@ -16899,7 +16951,7 @@
                   </a:tcPr>
                 </a:tc>
               </a:tr>
-              <a:tr h="438912">
+              <a:tr h="402336">
                 <a:tc>
                   <a:txBody>
                     <a:bodyPr wrap="square"/>
@@ -16991,7 +17043,7 @@
                   </a:tcPr>
                 </a:tc>
               </a:tr>
-              <a:tr h="438912">
+              <a:tr h="402336">
                 <a:tc>
                   <a:txBody>
                     <a:bodyPr wrap="square"/>
@@ -17083,7 +17135,7 @@
                   </a:tcPr>
                 </a:tc>
               </a:tr>
-              <a:tr h="438912">
+              <a:tr h="402336">
                 <a:tc>
                   <a:txBody>
                     <a:bodyPr wrap="square"/>
@@ -17175,7 +17227,7 @@
                   </a:tcPr>
                 </a:tc>
               </a:tr>
-              <a:tr h="438912">
+              <a:tr h="402336">
                 <a:tc>
                   <a:txBody>
                     <a:bodyPr wrap="square"/>
@@ -17196,13 +17248,105 @@
                           <a:cs typeface="Meiryo"/>
                           <a:ea typeface="Meiryo"/>
                         </a:rPr>
-                        <a:t>予約・請求・カルテ・機能フラグ</a:t>
+                        <a:t>予約・請求・カルテ</a:t>
                       </a:r>
                     </a:p>
                   </a:txBody>
                   <a:tcPr marL="64008" marR="64008" marT="27432" marB="27432" anchor="ctr">
                     <a:solidFill>
                       <a:srgbClr val="F8FAFC"/>
+                    </a:solidFill>
+                  </a:tcPr>
+                </a:tc>
+                <a:tc>
+                  <a:txBody>
+                    <a:bodyPr wrap="square"/>
+                    <a:lstStyle/>
+                    <a:p>
+                      <a:pPr algn="ctr">
+                        <a:lnSpc>
+                          <a:spcPct val="115000"/>
+                        </a:lnSpc>
+                        <a:buNone/>
+                      </a:pPr>
+                      <a:r>
+                        <a:rPr sz="1050" b="0">
+                          <a:solidFill>
+                            <a:srgbClr val="6D28D9"/>
+                          </a:solidFill>
+                          <a:latin typeface="Meiryo"/>
+                          <a:cs typeface="Meiryo"/>
+                          <a:ea typeface="Meiryo"/>
+                        </a:rPr>
+                        <a:t>スキーマのみ</a:t>
+                      </a:r>
+                    </a:p>
+                  </a:txBody>
+                  <a:tcPr marL="64008" marR="64008" marT="27432" marB="27432" anchor="ctr">
+                    <a:solidFill>
+                      <a:srgbClr val="F8FAFC"/>
+                    </a:solidFill>
+                  </a:tcPr>
+                </a:tc>
+                <a:tc>
+                  <a:txBody>
+                    <a:bodyPr wrap="square"/>
+                    <a:lstStyle/>
+                    <a:p>
+                      <a:pPr algn="l">
+                        <a:lnSpc>
+                          <a:spcPct val="115000"/>
+                        </a:lnSpc>
+                        <a:buNone/>
+                      </a:pPr>
+                      <a:r>
+                        <a:rPr sz="1050" b="0">
+                          <a:solidFill>
+                            <a:srgbClr val="14223A"/>
+                          </a:solidFill>
+                          <a:latin typeface="Meiryo"/>
+                          <a:cs typeface="Meiryo"/>
+                          <a:ea typeface="Meiryo"/>
+                        </a:rPr>
+                        <a:t>表・制約・ドキュメントはある。リポジトリ実装・API・画面はこれから</a:t>
+                      </a:r>
+                    </a:p>
+                  </a:txBody>
+                  <a:tcPr marL="64008" marR="64008" marT="27432" marB="27432" anchor="ctr">
+                    <a:solidFill>
+                      <a:srgbClr val="F8FAFC"/>
+                    </a:solidFill>
+                  </a:tcPr>
+                </a:tc>
+              </a:tr>
+              <a:tr h="402336">
+                <a:tc>
+                  <a:txBody>
+                    <a:bodyPr wrap="square"/>
+                    <a:lstStyle/>
+                    <a:p>
+                      <a:pPr algn="l">
+                        <a:lnSpc>
+                          <a:spcPct val="115000"/>
+                        </a:lnSpc>
+                        <a:buNone/>
+                      </a:pPr>
+                      <a:r>
+                        <a:rPr sz="1050" b="1">
+                          <a:solidFill>
+                            <a:srgbClr val="14223A"/>
+                          </a:solidFill>
+                          <a:latin typeface="Meiryo"/>
+                          <a:cs typeface="Meiryo"/>
+                          <a:ea typeface="Meiryo"/>
+                        </a:rPr>
+                        <a:t>業種差の吸収(機能フラグ)</a:t>
+                      </a:r>
+                    </a:p>
+                  </a:txBody>
+                  <a:tcPr marL="64008" marR="64008" marT="27432" marB="27432" anchor="ctr">
+                    <a:solidFill>
+                      <a:srgbClr val="FFFFFF"/>
                     </a:solidFill>
                   </a:tcPr>
                 </a:tc>
@@ -17232,7 +17376,7 @@
                   </a:txBody>
                   <a:tcPr marL="64008" marR="64008" marT="27432" marB="27432" anchor="ctr">
                     <a:solidFill>
-                      <a:srgbClr val="F8FAFC"/>
+                      <a:srgbClr val="FFFFFF"/>
                     </a:solidFill>
                   </a:tcPr>
                 </a:tc>
@@ -17256,18 +17400,18 @@
                           <a:cs typeface="Meiryo"/>
                           <a:ea typeface="Meiryo"/>
                         </a:rPr>
-                        <a:t>提案書の差別化要因だが、スキーマにテーブルすら無い</a:t>
+                        <a:t>tenant_features 等は設計方針のみで、テーブルは無い</a:t>
                       </a:r>
                     </a:p>
                   </a:txBody>
                   <a:tcPr marL="64008" marR="64008" marT="27432" marB="27432" anchor="ctr">
                     <a:solidFill>
-                      <a:srgbClr val="F8FAFC"/>
+                      <a:srgbClr val="FFFFFF"/>
                     </a:solidFill>
                   </a:tcPr>
                 </a:tc>
               </a:tr>
-              <a:tr h="438912">
+              <a:tr h="402336">
                 <a:tc>
                   <a:txBody>
                     <a:bodyPr wrap="square"/>
@@ -17294,7 +17438,7 @@
                   </a:txBody>
                   <a:tcPr marL="64008" marR="64008" marT="27432" marB="27432" anchor="ctr">
                     <a:solidFill>
-                      <a:srgbClr val="FFFFFF"/>
+                      <a:srgbClr val="F8FAFC"/>
                     </a:solidFill>
                   </a:tcPr>
                 </a:tc>
@@ -17324,7 +17468,7 @@
                   </a:txBody>
                   <a:tcPr marL="64008" marR="64008" marT="27432" marB="27432" anchor="ctr">
                     <a:solidFill>
-                      <a:srgbClr val="FFFFFF"/>
+                      <a:srgbClr val="F8FAFC"/>
                     </a:solidFill>
                   </a:tcPr>
                 </a:tc>
@@ -17348,13 +17492,13 @@
                           <a:cs typeface="Meiryo"/>
                           <a:ea typeface="Meiryo"/>
                         </a:rPr>
-                        <a:t>実際の出勤簿での照合はPhase 7</a:t>
+                        <a:t>実際の出勤簿での照合はこれから</a:t>
                       </a:r>
                     </a:p>
                   </a:txBody>
                   <a:tcPr marL="64008" marR="64008" marT="27432" marB="27432" anchor="ctr">
                     <a:solidFill>
-                      <a:srgbClr val="FFFFFF"/>
+                      <a:srgbClr val="F8FAFC"/>
                     </a:solidFill>
                   </a:tcPr>
                 </a:tc>
@@ -20265,7 +20409,7 @@
             <a:avLst/>
           </a:prstGeom>
           <a:solidFill>
-            <a:srgbClr val="B91C1C"/>
+            <a:srgbClr val="6D28D9"/>
           </a:solidFill>
           <a:ln>
             <a:noFill/>
@@ -20325,7 +20469,7 @@
             <a:r>
               <a:rPr sz="1300" b="1" i="0">
                 <a:solidFill>
-                  <a:srgbClr val="B91C1C"/>
+                  <a:srgbClr val="6D28D9"/>
                 </a:solidFill>
                 <a:latin typeface="Meiryo"/>
                 <a:cs typeface="Meiryo"/>
@@ -20373,7 +20517,7 @@
                 <a:cs typeface="Meiryo"/>
                 <a:ea typeface="Meiryo"/>
               </a:rPr>
-              <a:t>予約・請求・カルテをどう積むか</a:t>
+              <a:t>先行整備した5ドメインの進め方</a:t>
             </a:r>
           </a:p>
         </p:txBody>
@@ -20415,7 +20559,7 @@
                 <a:cs typeface="Meiryo"/>
                 <a:ea typeface="Meiryo"/>
               </a:rPr>
-              <a:t>提案書の差別化要因が、まだスキーマにも無い。二重予約の防止や請求の整合性は、あとから足すと既存データの移行が伴う。</a:t>
+              <a:t>予約・請求・カルテ・訪問最適化・移動手当は、表と制約だけ先に用意してある。予約の二重取りだけはDBで止められておらず、アプリ側の責任になっている。</a:t>
             </a:r>
           </a:p>
         </p:txBody>
@@ -20503,7 +20647,7 @@
                 <a:cs typeface="Meiryo"/>
                 <a:ea typeface="Meiryo"/>
               </a:rPr>
-              <a:t>いま土台に入れるか、要件が固まるまで後回しにするか</a:t>
+              <a:t>どのドメインから実装に進めるか / 二重取り防止をどこで担保するか</a:t>
             </a:r>
           </a:p>
         </p:txBody>
@@ -21157,7 +21301,7 @@
                 <a:cs typeface="Meiryo"/>
                 <a:ea typeface="Meiryo"/>
               </a:rPr>
-              <a:t>私の推奨:メール送信だけ別経路に逃がしたうえで、予約のスキーマを先に入れること。ただし意見ですので、ご判断をいただきたいです。</a:t>
+              <a:t>私の推奨:メール送信だけ別経路に逃がしたうえで、予約から実装に進めること。ただし意見ですので、ご判断をいただきたいです。</a:t>
             </a:r>
           </a:p>
         </p:txBody>
@@ -21663,7 +21807,7 @@
                 <a:cs typeface="Meiryo"/>
                 <a:ea typeface="Meiryo"/>
               </a:rPr>
-              <a:t>13テーブルすべてで同じスキーマ規約。新しい表を足す手順が決まっている</a:t>
+              <a:t>33テーブルすべてで同じスキーマ規約。新しい表を足す手順が決まっている</a:t>
             </a:r>
           </a:p>
           <a:p>
@@ -21689,7 +21833,7 @@
                 <a:cs typeface="Meiryo"/>
                 <a:ea typeface="Meiryo"/>
               </a:rPr>
-              <a:t>毎pushで静的検査・型検査・343件のテスト・本番ビルド・混入検査まで自動実行</a:t>
+              <a:t>毎pushで静的検査・型検査・692件のテスト・本番ビルド・混入検査まで自動実行</a:t>
             </a:r>
           </a:p>
         </p:txBody>
@@ -21924,7 +22068,7 @@
                 <a:cs typeface="Meiryo"/>
                 <a:ea typeface="Meiryo"/>
               </a:rPr>
-              <a:t>予約・請求・カルテを土台に入れる順番(③)</a:t>
+              <a:t>先行整備した5ドメインを実装へ進める順番(③)</a:t>
             </a:r>
           </a:p>
           <a:p>
@@ -21987,7 +22131,7 @@
                 <a:cs typeface="Meiryo"/>
                 <a:ea typeface="Meiryo"/>
               </a:rPr>
-              <a:t>:customers 35列の肥大化、業務データを平文にした前提、勤怠のJSON、金額の型、廃棄手順、監査の時期(doc/12 第3〜4章)</a:t>
+              <a:t>:customers 37列の肥大化、業務データを平文にした前提、予約の二重取り防止、廃棄手順、監査の時期(doc/12 第3〜4章)</a:t>
             </a:r>
           </a:p>
           <a:p>
@@ -22198,7 +22342,7 @@
                 <a:cs typeface="Meiryo"/>
                 <a:ea typeface="Meiryo"/>
               </a:rPr>
-              <a:t>doc/07 技術構成提案書 / doc/09 データベース構造解説 / doc/10 開発メモ / doc/11 アーキテクチャ説明スライド(HTML) / doc/12 データベース構造レビュー資料(PowerPoint)  —  公開デモ:https://ohru131.github.io/katahimo-app/</a:t>
+              <a:t>doc/07 技術構成提案書 / doc/09 データベース構造解説 / doc/10 GAS版連携の制約と方針 / doc/11 アーキテクチャ説明スライド(HTML) / doc/12 データベース構造レビュー資料(PowerPoint)  —  公開デモ:https://ohru131.github.io/katahimo-app/</a:t>
             </a:r>
           </a:p>
         </p:txBody>
@@ -22667,7 +22811,7 @@
                 <a:cs typeface="Meiryo"/>
                 <a:ea typeface="Meiryo"/>
               </a:rPr>
-              <a:t>doc/07_技術構成提案書.md / doc/10_開発メモ / README「フェーズ状況」</a:t>
+              <a:t>doc/07_技術構成提案書.md / doc/10_GAS版連携の制約と方針.md / README「実装状況」</a:t>
             </a:r>
           </a:p>
         </p:txBody>
@@ -23301,7 +23445,7 @@
                 <a:cs typeface="Meiryo"/>
                 <a:ea typeface="Meiryo"/>
               </a:rPr>
-              <a:t>:Phase 0〜8の段階移行</a:t>
+              <a:t>:GAS版と併存しながら段階的に移す</a:t>
             </a:r>
           </a:p>
         </p:txBody>
@@ -23435,7 +23579,7 @@
                 <a:cs typeface="Meiryo"/>
                 <a:ea typeface="Meiryo"/>
               </a:rPr>
-              <a:t>規模(2026-09)</a:t>
+              <a:t>規模</a:t>
             </a:r>
           </a:p>
         </p:txBody>
@@ -23521,7 +23665,7 @@
                 <a:cs typeface="Meiryo"/>
                 <a:ea typeface="Meiryo"/>
               </a:rPr>
-              <a:t>TypeScript 204ファイル / 約20,600行</a:t>
+              <a:t>TypeScript 228ファイル / 約25,900行</a:t>
             </a:r>
             <a:r>
               <a:rPr sz="1050" b="0">
@@ -23558,7 +23702,7 @@
                 <a:cs typeface="Meiryo"/>
                 <a:ea typeface="Meiryo"/>
               </a:rPr>
-              <a:t>テスト 43ファイル / 343件</a:t>
+              <a:t>テスト 55ファイル / 692件</a:t>
             </a:r>
             <a:r>
               <a:rPr sz="1050" b="0">
@@ -23595,7 +23739,7 @@
                 <a:cs typeface="Meiryo"/>
                 <a:ea typeface="Meiryo"/>
               </a:rPr>
-              <a:t>データベース 13テーブル</a:t>
+              <a:t>データベース 33テーブル</a:t>
             </a:r>
             <a:r>
               <a:rPr sz="1050" b="0">
@@ -23606,7 +23750,7 @@
                 <a:cs typeface="Meiryo"/>
                 <a:ea typeface="Meiryo"/>
               </a:rPr>
-              <a:t> / マイグレーション8本</a:t>
+              <a:t> / マイグレーション1本</a:t>
             </a:r>
           </a:p>
         </p:txBody>
@@ -23661,8 +23805,8 @@
         </p:nvSpPr>
         <p:spPr>
           <a:xfrm>
-            <a:off x="457200" y="3931920"/>
-            <a:ext cx="11277295" cy="658368"/>
+            <a:off x="457200" y="3886200"/>
+            <a:ext cx="11277295" cy="530352"/>
           </a:xfrm>
           <a:prstGeom prst="roundRect">
             <a:avLst>
@@ -23707,8 +23851,8 @@
         </p:nvSpPr>
         <p:spPr>
           <a:xfrm>
-            <a:off x="457200" y="3931920"/>
-            <a:ext cx="68580" cy="658368"/>
+            <a:off x="457200" y="3886200"/>
+            <a:ext cx="68580" cy="530352"/>
           </a:xfrm>
           <a:prstGeom prst="rect">
             <a:avLst/>
@@ -23751,7 +23895,7 @@
         </p:nvSpPr>
         <p:spPr>
           <a:xfrm>
-            <a:off x="658368" y="4133087"/>
+            <a:off x="658368" y="4023360"/>
             <a:ext cx="2286000" cy="274320"/>
           </a:xfrm>
           <a:prstGeom prst="rect">
@@ -23793,8 +23937,8 @@
         </p:nvSpPr>
         <p:spPr>
           <a:xfrm>
-            <a:off x="3108960" y="4059935"/>
-            <a:ext cx="8351215" cy="502920"/>
+            <a:off x="3108960" y="3950208"/>
+            <a:ext cx="8351215" cy="438912"/>
           </a:xfrm>
           <a:prstGeom prst="rect">
             <a:avLst/>
@@ -23835,8 +23979,8 @@
         </p:nvSpPr>
         <p:spPr>
           <a:xfrm>
-            <a:off x="457200" y="4663440"/>
-            <a:ext cx="11277295" cy="658368"/>
+            <a:off x="457200" y="4471416"/>
+            <a:ext cx="11277295" cy="530352"/>
           </a:xfrm>
           <a:prstGeom prst="roundRect">
             <a:avLst>
@@ -23881,8 +24025,8 @@
         </p:nvSpPr>
         <p:spPr>
           <a:xfrm>
-            <a:off x="457200" y="4663440"/>
-            <a:ext cx="68580" cy="658368"/>
+            <a:off x="457200" y="4471416"/>
+            <a:ext cx="68580" cy="530352"/>
           </a:xfrm>
           <a:prstGeom prst="rect">
             <a:avLst/>
@@ -23925,7 +24069,7 @@
         </p:nvSpPr>
         <p:spPr>
           <a:xfrm>
-            <a:off x="658368" y="4864607"/>
+            <a:off x="658368" y="4608576"/>
             <a:ext cx="2286000" cy="274320"/>
           </a:xfrm>
           <a:prstGeom prst="rect">
@@ -23967,8 +24111,8 @@
         </p:nvSpPr>
         <p:spPr>
           <a:xfrm>
-            <a:off x="3108960" y="4791455"/>
-            <a:ext cx="8351215" cy="502920"/>
+            <a:off x="3108960" y="4535424"/>
+            <a:ext cx="8351215" cy="438912"/>
           </a:xfrm>
           <a:prstGeom prst="rect">
             <a:avLst/>
@@ -24009,8 +24153,182 @@
         </p:nvSpPr>
         <p:spPr>
           <a:xfrm>
-            <a:off x="457200" y="5394959"/>
-            <a:ext cx="11277295" cy="658368"/>
+            <a:off x="457200" y="5056631"/>
+            <a:ext cx="11277295" cy="530352"/>
+          </a:xfrm>
+          <a:prstGeom prst="roundRect">
+            <a:avLst>
+              <a:gd name="adj" fmla="val 12000"/>
+            </a:avLst>
+          </a:prstGeom>
+          <a:solidFill>
+            <a:srgbClr val="EDE9FE"/>
+          </a:solidFill>
+          <a:ln>
+            <a:noFill/>
+          </a:ln>
+          <a:effectLst/>
+        </p:spPr>
+        <p:style>
+          <a:lnRef idx="1">
+            <a:schemeClr val="accent1"/>
+          </a:lnRef>
+          <a:fillRef idx="3">
+            <a:schemeClr val="accent1"/>
+          </a:fillRef>
+          <a:effectRef idx="2">
+            <a:schemeClr val="accent1"/>
+          </a:effectRef>
+          <a:fontRef idx="minor">
+            <a:schemeClr val="lt1"/>
+          </a:fontRef>
+        </p:style>
+        <p:txBody>
+          <a:bodyPr rtlCol="0" anchor="ctr" wrap="square"/>
+          <a:lstStyle/>
+          <a:p>
+            <a:pPr algn="ctr"/>
+          </a:p>
+        </p:txBody>
+      </p:sp>
+      <p:sp>
+        <p:nvSpPr>
+          <p:cNvPr id="29" name="Rectangle 28"/>
+          <p:cNvSpPr/>
+          <p:nvPr/>
+        </p:nvSpPr>
+        <p:spPr>
+          <a:xfrm>
+            <a:off x="457200" y="5056631"/>
+            <a:ext cx="68580" cy="530352"/>
+          </a:xfrm>
+          <a:prstGeom prst="rect">
+            <a:avLst/>
+          </a:prstGeom>
+          <a:solidFill>
+            <a:srgbClr val="6D28D9"/>
+          </a:solidFill>
+          <a:ln>
+            <a:noFill/>
+          </a:ln>
+          <a:effectLst/>
+        </p:spPr>
+        <p:style>
+          <a:lnRef idx="1">
+            <a:schemeClr val="accent1"/>
+          </a:lnRef>
+          <a:fillRef idx="3">
+            <a:schemeClr val="accent1"/>
+          </a:fillRef>
+          <a:effectRef idx="2">
+            <a:schemeClr val="accent1"/>
+          </a:effectRef>
+          <a:fontRef idx="minor">
+            <a:schemeClr val="lt1"/>
+          </a:fontRef>
+        </p:style>
+        <p:txBody>
+          <a:bodyPr rtlCol="0" anchor="ctr" wrap="square"/>
+          <a:lstStyle/>
+          <a:p>
+            <a:pPr algn="ctr"/>
+          </a:p>
+        </p:txBody>
+      </p:sp>
+      <p:sp>
+        <p:nvSpPr>
+          <p:cNvPr id="30" name="TextBox 29"/>
+          <p:cNvSpPr txBox="1"/>
+          <p:nvPr/>
+        </p:nvSpPr>
+        <p:spPr>
+          <a:xfrm>
+            <a:off x="658368" y="5193792"/>
+            <a:ext cx="2286000" cy="274320"/>
+          </a:xfrm>
+          <a:prstGeom prst="rect">
+            <a:avLst/>
+          </a:prstGeom>
+          <a:noFill/>
+        </p:spPr>
+        <p:txBody>
+          <a:bodyPr wrap="square" lIns="0" rIns="0" tIns="0" bIns="0" anchor="t">
+            <a:spAutoFit/>
+          </a:bodyPr>
+          <a:lstStyle/>
+          <a:p>
+            <a:pPr algn="l">
+              <a:lnSpc>
+                <a:spcPct val="125000"/>
+              </a:lnSpc>
+              <a:buNone/>
+            </a:pPr>
+            <a:r>
+              <a:rPr sz="1200" b="1" i="0">
+                <a:solidFill>
+                  <a:srgbClr val="6D28D9"/>
+                </a:solidFill>
+                <a:latin typeface="Meiryo"/>
+                <a:cs typeface="Meiryo"/>
+                <a:ea typeface="Meiryo"/>
+              </a:rPr>
+              <a:t>スキーマのみ</a:t>
+            </a:r>
+          </a:p>
+        </p:txBody>
+      </p:sp>
+      <p:sp>
+        <p:nvSpPr>
+          <p:cNvPr id="31" name="TextBox 30"/>
+          <p:cNvSpPr txBox="1"/>
+          <p:nvPr/>
+        </p:nvSpPr>
+        <p:spPr>
+          <a:xfrm>
+            <a:off x="3108960" y="5120640"/>
+            <a:ext cx="8351215" cy="438912"/>
+          </a:xfrm>
+          <a:prstGeom prst="rect">
+            <a:avLst/>
+          </a:prstGeom>
+          <a:noFill/>
+        </p:spPr>
+        <p:txBody>
+          <a:bodyPr wrap="square" lIns="0" rIns="0" tIns="0" bIns="0" anchor="t">
+            <a:spAutoFit/>
+          </a:bodyPr>
+          <a:lstStyle/>
+          <a:p>
+            <a:pPr algn="l">
+              <a:lnSpc>
+                <a:spcPct val="130000"/>
+              </a:lnSpc>
+              <a:buNone/>
+            </a:pPr>
+            <a:r>
+              <a:rPr sz="1100" b="0" i="0">
+                <a:solidFill>
+                  <a:srgbClr val="14223A"/>
+                </a:solidFill>
+                <a:latin typeface="Meiryo"/>
+                <a:cs typeface="Meiryo"/>
+                <a:ea typeface="Meiryo"/>
+              </a:rPr>
+              <a:t>予約 / 請求・決済 / 顧客カルテ / 訪問割当の最適化 / 移動手当(表と制約はあるが、実装・API・画面は無い)</a:t>
+            </a:r>
+          </a:p>
+        </p:txBody>
+      </p:sp>
+      <p:sp>
+        <p:nvSpPr>
+          <p:cNvPr id="32" name="Rounded Rectangle 31"/>
+          <p:cNvSpPr/>
+          <p:nvPr/>
+        </p:nvSpPr>
+        <p:spPr>
+          <a:xfrm>
+            <a:off x="457200" y="5641847"/>
+            <a:ext cx="11277295" cy="530352"/>
           </a:xfrm>
           <a:prstGeom prst="roundRect">
             <a:avLst>
@@ -24049,14 +24367,14 @@
       </p:sp>
       <p:sp>
         <p:nvSpPr>
-          <p:cNvPr id="29" name="Rectangle 28"/>
+          <p:cNvPr id="33" name="Rectangle 32"/>
           <p:cNvSpPr/>
           <p:nvPr/>
         </p:nvSpPr>
         <p:spPr>
           <a:xfrm>
-            <a:off x="457200" y="5394959"/>
-            <a:ext cx="68580" cy="658368"/>
+            <a:off x="457200" y="5641847"/>
+            <a:ext cx="68580" cy="530352"/>
           </a:xfrm>
           <a:prstGeom prst="rect">
             <a:avLst/>
@@ -24093,13 +24411,13 @@
       </p:sp>
       <p:sp>
         <p:nvSpPr>
-          <p:cNvPr id="30" name="TextBox 29"/>
+          <p:cNvPr id="34" name="TextBox 33"/>
           <p:cNvSpPr txBox="1"/>
           <p:nvPr/>
         </p:nvSpPr>
         <p:spPr>
           <a:xfrm>
-            <a:off x="658368" y="5596127"/>
+            <a:off x="658368" y="5779007"/>
             <a:ext cx="2286000" cy="274320"/>
           </a:xfrm>
           <a:prstGeom prst="rect">
@@ -24135,14 +24453,14 @@
       </p:sp>
       <p:sp>
         <p:nvSpPr>
-          <p:cNvPr id="31" name="TextBox 30"/>
+          <p:cNvPr id="35" name="TextBox 34"/>
           <p:cNvSpPr txBox="1"/>
           <p:nvPr/>
         </p:nvSpPr>
         <p:spPr>
           <a:xfrm>
-            <a:off x="3108960" y="5522975"/>
-            <a:ext cx="8351215" cy="502920"/>
+            <a:off x="3108960" y="5705855"/>
+            <a:ext cx="8351215" cy="438912"/>
           </a:xfrm>
           <a:prstGeom prst="rect">
             <a:avLst/>
@@ -24170,20 +24488,20 @@
                 <a:cs typeface="Meiryo"/>
                 <a:ea typeface="Meiryo"/>
               </a:rPr>
-              <a:t>本番デプロイ(Cloud Run) / 予約・請求・カルテ / Cloud KMS / 再暗号化バッチ / 並行運用の照合</a:t>
-            </a:r>
-          </a:p>
-        </p:txBody>
-      </p:sp>
-      <p:sp>
-        <p:nvSpPr>
-          <p:cNvPr id="32" name="TextBox 31"/>
+              <a:t>本番デプロイ(Cloud Run) / Cloud KMS / 再暗号化バッチ / 実データでの並行運用の照合</a:t>
+            </a:r>
+          </a:p>
+        </p:txBody>
+      </p:sp>
+      <p:sp>
+        <p:nvSpPr>
+          <p:cNvPr id="36" name="TextBox 35"/>
           <p:cNvSpPr txBox="1"/>
           <p:nvPr/>
         </p:nvSpPr>
         <p:spPr>
           <a:xfrm>
-            <a:off x="457200" y="6144768"/>
+            <a:off x="457200" y="6199632"/>
             <a:ext cx="11277295" cy="274320"/>
           </a:xfrm>
           <a:prstGeom prst="rect">
@@ -24204,7 +24522,7 @@
               <a:buNone/>
             </a:pPr>
             <a:r>
-              <a:rPr sz="1100" b="0" i="0">
+              <a:rPr sz="1050" b="0" i="0">
                 <a:solidFill>
                   <a:srgbClr val="64748B"/>
                 </a:solidFill>
@@ -24212,7 +24530,7 @@
                 <a:cs typeface="Meiryo"/>
                 <a:ea typeface="Meiryo"/>
               </a:rPr>
-              <a:t>本資料で「未検証」「未着手」と書いたものは、提案書では実現済みのように読めてしまう部分です。先に区別をお伝えします。</a:t>
+              <a:t>「未検証」「未着手」と書いたものは、提案書では実現済みのように読めてしまう部分です。先に区別をお伝えします。</a:t>
             </a:r>
           </a:p>
         </p:txBody>
@@ -30340,7 +30658,7 @@
                 <a:ea typeface="Meiryo"/>
               </a:rPr>
               <a:t>「保存する」「送る」「暗号化する」という
-形(インターフェース)を26本定義している。
+形(インターフェース)を28本定義している。
 中身は書かない</a:t>
             </a:r>
           </a:p>

--- a/doc/13_アーキテクチャ説明資料.pptx
+++ b/doc/13_アーキテクチャ説明資料.pptx
@@ -3501,7 +3501,7 @@
                 <a:cs typeface="Meiryo"/>
                 <a:ea typeface="Meiryo"/>
               </a:rPr>
-              <a:t>窓口(ポート)の一覧 — 28本</a:t>
+              <a:t>窓口(ポート)の一覧 — 29本</a:t>
             </a:r>
             <a:r>
               <a:rPr sz="1250" b="0" i="0">
@@ -4936,7 +4936,7 @@
                 <a:cs typeface="Meiryo"/>
                 <a:ea typeface="Meiryo"/>
               </a:rPr>
-              <a:t>テストでは偽の実装を渡すだけで済む。データベースも外部APIも起動しないため、692件のテストが約15秒で終わる</a:t>
+              <a:t>テストでは偽の実装を渡すだけで済む。データベースも外部APIも起動しないため、728件のテストが約15秒で終わる</a:t>
             </a:r>
           </a:p>
         </p:txBody>
@@ -13444,7 +13444,7 @@
                 <a:cs typeface="Meiryo"/>
                 <a:ea typeface="Meiryo"/>
               </a:rPr>
-              <a:t>同じマイグレーション(33テーブル)・同じ行レベルセキュリティ・同じ業務ロジック・同じAPIルート</a:t>
+              <a:t>同じマイグレーション(34テーブル)・同じ行レベルセキュリティ・同じ業務ロジック・同じAPIルート</a:t>
             </a:r>
           </a:p>
           <a:p>
@@ -14364,7 +14364,7 @@
                 <a:cs typeface="Meiryo"/>
                 <a:ea typeface="Meiryo"/>
               </a:rPr>
-              <a:t>   テスト55ファイル / 692件。分布は意図的に偏らせている</a:t>
+              <a:t>   テスト56ファイル / 728件。分布は意図的に偏らせている</a:t>
             </a:r>
           </a:p>
         </p:txBody>
@@ -16664,7 +16664,7 @@
                           <a:cs typeface="Meiryo"/>
                           <a:ea typeface="Meiryo"/>
                         </a:rPr>
-                        <a:t>33テーブル、複合外部キー、FORCE。静的検査と実DB検証をCIで実行</a:t>
+                        <a:t>34テーブル、複合外部キー、FORCE。静的検査と実DB検証をCIで実行</a:t>
                       </a:r>
                     </a:p>
                   </a:txBody>
@@ -21807,7 +21807,7 @@
                 <a:cs typeface="Meiryo"/>
                 <a:ea typeface="Meiryo"/>
               </a:rPr>
-              <a:t>33テーブルすべてで同じスキーマ規約。新しい表を足す手順が決まっている</a:t>
+              <a:t>34テーブルすべてで同じスキーマ規約。新しい表を足す手順が決まっている</a:t>
             </a:r>
           </a:p>
           <a:p>
@@ -21833,7 +21833,7 @@
                 <a:cs typeface="Meiryo"/>
                 <a:ea typeface="Meiryo"/>
               </a:rPr>
-              <a:t>毎pushで静的検査・型検査・692件のテスト・本番ビルド・混入検査まで自動実行</a:t>
+              <a:t>毎pushで静的検査・型検査・728件のテスト・本番ビルド・混入検査まで自動実行</a:t>
             </a:r>
           </a:p>
         </p:txBody>
@@ -23665,7 +23665,7 @@
                 <a:cs typeface="Meiryo"/>
                 <a:ea typeface="Meiryo"/>
               </a:rPr>
-              <a:t>TypeScript 228ファイル / 約25,900行</a:t>
+              <a:t>TypeScript 229ファイル / 約27,500行</a:t>
             </a:r>
             <a:r>
               <a:rPr sz="1050" b="0">
@@ -23702,7 +23702,7 @@
                 <a:cs typeface="Meiryo"/>
                 <a:ea typeface="Meiryo"/>
               </a:rPr>
-              <a:t>テスト 55ファイル / 692件</a:t>
+              <a:t>テスト 56ファイル / 728件</a:t>
             </a:r>
             <a:r>
               <a:rPr sz="1050" b="0">
@@ -23739,7 +23739,7 @@
                 <a:cs typeface="Meiryo"/>
                 <a:ea typeface="Meiryo"/>
               </a:rPr>
-              <a:t>データベース 33テーブル</a:t>
+              <a:t>データベース 34テーブル</a:t>
             </a:r>
             <a:r>
               <a:rPr sz="1050" b="0">
@@ -30658,7 +30658,7 @@
                 <a:ea typeface="Meiryo"/>
               </a:rPr>
               <a:t>「保存する」「送る」「暗号化する」という
-形(インターフェース)を28本定義している。
+形(インターフェース)を29本定義している。
 中身は書かない</a:t>
             </a:r>
           </a:p>
